--- a/decks/englit-inspector/englit-inspector_ch2_curtain-rises.pptx
+++ b/decks/englit-inspector/englit-inspector_ch2_curtain-rises.pptx
@@ -127,30 +127,30 @@
   <p:extLst>
     <p:ext uri="{521415D9-36F7-43E2-AB2F-B90AF26B5E84}">
       <p14:sectionLst xmlns:p14="http://schemas.microsoft.com/office/powerpoint/2010/main">
-        <p14:section name="Opening" id="{aca720a3-e489-aec8-bb3b-b51ad708774e}">
+        <p14:section name="Opening" id="{21054234-3509-5fd1-6a23-fea8efef58f0}">
           <p14:sldIdLst>
             <p14:sldId id="256"/>
           </p14:sldIdLst>
         </p14:section>
-        <p14:section name="Gate" id="{0508c7ff-c7bb-3554-da37-11c7ef468d6f}">
+        <p14:section name="Gate" id="{9948aede-70d1-fc53-02fe-b30a5efc157b}">
           <p14:sldIdLst>
             <p14:sldId id="257"/>
             <p14:sldId id="258"/>
           </p14:sldIdLst>
         </p14:section>
-        <p14:section name="Pre-teach" id="{0cd86998-04a8-b747-e55f-15642a7578e7}">
+        <p14:section name="Pre-teach" id="{6203ba63-0cc3-90c0-81e4-3561e88da30c}">
           <p14:sldIdLst>
             <p14:sldId id="259"/>
             <p14:sldId id="260"/>
           </p14:sldIdLst>
         </p14:section>
-        <p14:section name="Read-along" id="{057eb262-6ff6-eb11-aa4b-495c02294923}">
+        <p14:section name="Read-along" id="{4a042d43-86e1-f907-ff8b-82ff87b70bca}">
           <p14:sldIdLst>
             <p14:sldId id="261"/>
             <p14:sldId id="262"/>
           </p14:sldIdLst>
         </p14:section>
-        <p14:section name="Teach" id="{e664429f-6078-8632-c7f6-58996be31095}">
+        <p14:section name="Teach" id="{9712bc90-6e02-9f5e-4add-23ba24c4b561}">
           <p14:sldIdLst>
             <p14:sldId id="263"/>
             <p14:sldId id="264"/>
@@ -158,7 +158,7 @@
             <p14:sldId id="266"/>
           </p14:sldIdLst>
         </p14:section>
-        <p14:section name="Routes" id="{23857293-0fb0-8543-99c0-516898fa2951}">
+        <p14:section name="Routes" id="{a9efaa5c-bc57-cc6a-e93b-4905e6ddfbc5}">
           <p14:sldIdLst>
             <p14:sldId id="267"/>
             <p14:sldId id="268"/>
@@ -167,12 +167,12 @@
             <p14:sldId id="271"/>
           </p14:sldIdLst>
         </p14:section>
-        <p14:section name="Close" id="{5d091108-e36d-cea1-cdac-0fa9ac5be132}">
+        <p14:section name="Close" id="{5856b9a2-d8d0-440d-f74b-690f552af502}">
           <p14:sldIdLst>
             <p14:sldId id="272"/>
           </p14:sldIdLst>
         </p14:section>
-        <p14:section name="Answers" id="{22a2a274-6c02-390d-14a2-445955f0a211}">
+        <p14:section name="Answers" id="{097b4f16-9a00-346c-8cf2-b2f02717f652}">
           <p14:sldIdLst>
             <p14:sldId id="273"/>
             <p14:sldId id="274"/>
@@ -1423,7 +1423,7 @@
             <a:r>
               <a:rPr lang="en-US" dirty="0"/>
               <a:t>Answers — task 1: Why the doorbell rings when it does. Reveal the answer; pupils mark their own work in a different colour, then read the "why" together. Same destination for every lane, so one answer serves the whole class.
-Answer: A   To interrupt Birling's selfish creed with the one person who will spend the play proving it wrong
+Answer: D   To interrupt Birling's selfish creed with the one person who will spend the play proving it wrong
 Why: Structure is a method. The bell interrupts the clearest statement of capitalism in the play with the arrival of the character who stands for its opposite, so the audience hears the argument before it begins.
 Ask a Support pupil to explain one step, and a Stretch pupil to share their extension.</a:t>
             </a:r>
@@ -5802,7 +5802,7 @@
                 <a:ea typeface="Calibri" pitchFamily="34" charset="-122"/>
                 <a:cs typeface="Calibri" pitchFamily="34" charset="-120"/>
               </a:rPr>
-              <a:t>To interrupt Birling's selfish creed with the one person who will spend the play proving it wrong</a:t>
+              <a:t>To show that Birling is a popular man who receives many visitors</a:t>
             </a:r>
             <a:endParaRPr lang="en-US" sz="2600" dirty="0"/>
           </a:p>
@@ -5839,7 +5839,7 @@
                 <a:ea typeface="Calibri" pitchFamily="34" charset="-122"/>
                 <a:cs typeface="Calibri" pitchFamily="34" charset="-120"/>
               </a:rPr>
-              <a:t>Because the Inspector is late and has missed the dinner</a:t>
+              <a:t>Because Priestley needed a reason to change the scenery</a:t>
             </a:r>
             <a:endParaRPr lang="en-US" sz="2600" dirty="0"/>
           </a:p>
@@ -5876,7 +5876,7 @@
                 <a:ea typeface="Calibri" pitchFamily="34" charset="-122"/>
                 <a:cs typeface="Calibri" pitchFamily="34" charset="-120"/>
               </a:rPr>
-              <a:t>To show that Birling is a popular man who receives many visitors</a:t>
+              <a:t>Because the Inspector is late and has missed the dinner</a:t>
             </a:r>
             <a:endParaRPr lang="en-US" sz="2600" dirty="0"/>
           </a:p>
@@ -5913,7 +5913,7 @@
                 <a:ea typeface="Calibri" pitchFamily="34" charset="-122"/>
                 <a:cs typeface="Calibri" pitchFamily="34" charset="-120"/>
               </a:rPr>
-              <a:t>Because Priestley needed a reason to change the scenery</a:t>
+              <a:t>To interrupt Birling's selfish creed with the one person who will spend the play proving it wrong</a:t>
             </a:r>
             <a:endParaRPr lang="en-US" sz="2600" dirty="0"/>
           </a:p>
@@ -9037,7 +9037,7 @@
                 <a:ea typeface="Calibri" pitchFamily="34" charset="-122"/>
                 <a:cs typeface="Calibri" pitchFamily="34" charset="-120"/>
               </a:rPr>
-              <a:t>It dims until the stage is almost dark</a:t>
+              <a:t>It turns deep red</a:t>
             </a:r>
             <a:endParaRPr lang="en-US" sz="2400" dirty="0"/>
           </a:p>
@@ -9074,7 +9074,7 @@
                 <a:ea typeface="Calibri" pitchFamily="34" charset="-122"/>
                 <a:cs typeface="Calibri" pitchFamily="34" charset="-120"/>
               </a:rPr>
-              <a:t>It turns deep red</a:t>
+              <a:t>It dims until the stage is almost dark</a:t>
             </a:r>
             <a:endParaRPr lang="en-US" sz="2400" dirty="0"/>
           </a:p>
@@ -9553,7 +9553,7 @@
                 <a:ea typeface="Cambria" pitchFamily="34" charset="-122"/>
                 <a:cs typeface="Cambria" pitchFamily="34" charset="-120"/>
               </a:rPr>
-              <a:t>A   To interrupt Birling's selfish creed with the one person who will spend the play proving it wrong</a:t>
+              <a:t>D   To interrupt Birling's selfish creed with the one person who will spend the play proving it wrong</a:t>
             </a:r>
             <a:endParaRPr lang="en-US" sz="1800" dirty="0"/>
           </a:p>
@@ -10717,7 +10717,7 @@
                 <a:ea typeface="Calibri" pitchFamily="34" charset="-122"/>
                 <a:cs typeface="Calibri" pitchFamily="34" charset="-120"/>
               </a:rPr>
-              <a:t>It dims until the stage is almost dark</a:t>
+              <a:t>It turns deep red</a:t>
             </a:r>
             <a:endParaRPr lang="en-US" sz="2000" dirty="0"/>
           </a:p>
@@ -10754,7 +10754,7 @@
                 <a:ea typeface="Calibri" pitchFamily="34" charset="-122"/>
                 <a:cs typeface="Calibri" pitchFamily="34" charset="-120"/>
               </a:rPr>
-              <a:t>It turns deep red</a:t>
+              <a:t>It dims until the stage is almost dark</a:t>
             </a:r>
             <a:endParaRPr lang="en-US" sz="2000" dirty="0"/>
           </a:p>

--- a/decks/englit-inspector/englit-inspector_ch2_curtain-rises.pptx
+++ b/decks/englit-inspector/englit-inspector_ch2_curtain-rises.pptx
@@ -127,30 +127,30 @@
   <p:extLst>
     <p:ext uri="{521415D9-36F7-43E2-AB2F-B90AF26B5E84}">
       <p14:sectionLst xmlns:p14="http://schemas.microsoft.com/office/powerpoint/2010/main">
-        <p14:section name="Opening" id="{21054234-3509-5fd1-6a23-fea8efef58f0}">
+        <p14:section name="Opening" id="{a2ac5bd3-c514-c63c-efd4-d7721347bed1}">
           <p14:sldIdLst>
             <p14:sldId id="256"/>
           </p14:sldIdLst>
         </p14:section>
-        <p14:section name="Gate" id="{9948aede-70d1-fc53-02fe-b30a5efc157b}">
+        <p14:section name="Gate" id="{cd5bb417-776c-1470-cd20-62a7753b7049}">
           <p14:sldIdLst>
             <p14:sldId id="257"/>
             <p14:sldId id="258"/>
           </p14:sldIdLst>
         </p14:section>
-        <p14:section name="Pre-teach" id="{6203ba63-0cc3-90c0-81e4-3561e88da30c}">
+        <p14:section name="Pre-teach" id="{807ec521-3d33-7fc5-8a1e-8567cff8e154}">
           <p14:sldIdLst>
             <p14:sldId id="259"/>
             <p14:sldId id="260"/>
           </p14:sldIdLst>
         </p14:section>
-        <p14:section name="Read-along" id="{4a042d43-86e1-f907-ff8b-82ff87b70bca}">
+        <p14:section name="Read-along" id="{b368ec67-97e1-d452-57bd-7d03fa37e28f}">
           <p14:sldIdLst>
             <p14:sldId id="261"/>
             <p14:sldId id="262"/>
           </p14:sldIdLst>
         </p14:section>
-        <p14:section name="Teach" id="{9712bc90-6e02-9f5e-4add-23ba24c4b561}">
+        <p14:section name="Teach" id="{f67f320d-e22e-852b-ea53-23e8b77bab37}">
           <p14:sldIdLst>
             <p14:sldId id="263"/>
             <p14:sldId id="264"/>
@@ -158,7 +158,7 @@
             <p14:sldId id="266"/>
           </p14:sldIdLst>
         </p14:section>
-        <p14:section name="Routes" id="{a9efaa5c-bc57-cc6a-e93b-4905e6ddfbc5}">
+        <p14:section name="Routes" id="{0c1c2964-72b9-2460-a76c-408fbfd7606c}">
           <p14:sldIdLst>
             <p14:sldId id="267"/>
             <p14:sldId id="268"/>
@@ -167,12 +167,12 @@
             <p14:sldId id="271"/>
           </p14:sldIdLst>
         </p14:section>
-        <p14:section name="Close" id="{5856b9a2-d8d0-440d-f74b-690f552af502}">
+        <p14:section name="Close" id="{6d47b08d-dc56-a1bb-9724-c211489d5750}">
           <p14:sldIdLst>
             <p14:sldId id="272"/>
           </p14:sldIdLst>
         </p14:section>
-        <p14:section name="Answers" id="{097b4f16-9a00-346c-8cf2-b2f02717f652}">
+        <p14:section name="Answers" id="{08f7a228-e0af-38ac-2944-bc7dc8910b18}">
           <p14:sldIdLst>
             <p14:sldId id="273"/>
             <p14:sldId id="274"/>
